--- a/reports/stage20/presentations/03_QUAN_LY_DU_AN_CNTT_WORKSPHERE.pptx
+++ b/reports/stage20/presentations/03_QUAN_LY_DU_AN_CNTT_WORKSPHERE.pptx
@@ -530,7 +530,7 @@
           <a:p/>
           <a:p>
             <a:r>
-              <a:t>THỜI LƯỢNG DỰ KIẾN: 1 phút (PROJECT_PROPOSAL)</a:t>
+              <a:t>THỜI LƯỢNG DỰ KIẾN: 20 giây (~0.3 phút) (PROJECT_PROPOSAL)</a:t>
             </a:r>
           </a:p>
           <a:p>
@@ -642,7 +642,7 @@
           <a:p/>
           <a:p>
             <a:r>
-              <a:t>THỜI LƯỢNG DỰ KIẾN: 1.5 phút (PROJECT_PROPOSAL)</a:t>
+              <a:t>THỜI LƯỢNG DỰ KIẾN: 60 giây (~1.0 phút) (PROJECT_PROPOSAL)</a:t>
             </a:r>
           </a:p>
           <a:p>
@@ -754,7 +754,7 @@
           <a:p/>
           <a:p>
             <a:r>
-              <a:t>THỜI LƯỢNG DỰ KIẾN: 1.5 phút (PROJECT_PROPOSAL)</a:t>
+              <a:t>THỜI LƯỢNG DỰ KIẾN: 65 giây (~1.1 phút) (PROJECT_PROPOSAL)</a:t>
             </a:r>
           </a:p>
           <a:p>
@@ -866,7 +866,7 @@
           <a:p/>
           <a:p>
             <a:r>
-              <a:t>THỜI LƯỢNG DỰ KIẾN: 1 phút (PROJECT_PROPOSAL)</a:t>
+              <a:t>THỜI LƯỢNG DỰ KIẾN: 30 giây (~0.5 phút) (PROJECT_PROPOSAL)</a:t>
             </a:r>
           </a:p>
           <a:p>
@@ -978,7 +978,7 @@
           <a:p/>
           <a:p>
             <a:r>
-              <a:t>THỜI LƯỢNG DỰ KIẾN: 1.5 phút (PROJECT_PROPOSAL)</a:t>
+              <a:t>THỜI LƯỢNG DỰ KIẾN: 50 giây (~0.8 phút) (PROJECT_PROPOSAL)</a:t>
             </a:r>
           </a:p>
           <a:p>
@@ -1090,7 +1090,7 @@
           <a:p/>
           <a:p>
             <a:r>
-              <a:t>THỜI LƯỢNG DỰ KIẾN: 1.5 phút (PROJECT_PROPOSAL)</a:t>
+              <a:t>THỜI LƯỢNG DỰ KIẾN: 60 giây (~1.0 phút) (PROJECT_PROPOSAL)</a:t>
             </a:r>
           </a:p>
           <a:p>
@@ -1202,7 +1202,7 @@
           <a:p/>
           <a:p>
             <a:r>
-              <a:t>THỜI LƯỢNG DỰ KIẾN: 1.5 phút (PROJECT_PROPOSAL)</a:t>
+              <a:t>THỜI LƯỢNG DỰ KIẾN: 55 giây (~0.9 phút) (PROJECT_PROPOSAL)</a:t>
             </a:r>
           </a:p>
           <a:p>
@@ -1314,7 +1314,7 @@
           <a:p/>
           <a:p>
             <a:r>
-              <a:t>THỜI LƯỢNG DỰ KIẾN: 1.5 phút (PROJECT_PROPOSAL)</a:t>
+              <a:t>THỜI LƯỢNG DỰ KIẾN: 70 giây (~1.2 phút) (PROJECT_PROPOSAL)</a:t>
             </a:r>
           </a:p>
           <a:p>
@@ -1426,7 +1426,7 @@
           <a:p/>
           <a:p>
             <a:r>
-              <a:t>THỜI LƯỢNG DỰ KIẾN: 1.5 phút (PROJECT_PROPOSAL)</a:t>
+              <a:t>THỜI LƯỢNG DỰ KIẾN: 80 giây (~1.3 phút) (PROJECT_PROPOSAL)</a:t>
             </a:r>
           </a:p>
           <a:p>
@@ -1538,7 +1538,7 @@
           <a:p/>
           <a:p>
             <a:r>
-              <a:t>THỜI LƯỢNG DỰ KIẾN: 1.5 phút (PROJECT_PROPOSAL)</a:t>
+              <a:t>THỜI LƯỢNG DỰ KIẾN: 75 giây (~1.2 phút) (PROJECT_PROPOSAL)</a:t>
             </a:r>
           </a:p>
           <a:p>
@@ -1650,7 +1650,7 @@
           <a:p/>
           <a:p>
             <a:r>
-              <a:t>THỜI LƯỢNG DỰ KIẾN: 1.5 phút (PROJECT_PROPOSAL)</a:t>
+              <a:t>THỜI LƯỢNG DỰ KIẾN: 65 giây (~1.1 phút) (PROJECT_PROPOSAL)</a:t>
             </a:r>
           </a:p>
           <a:p>
@@ -1762,7 +1762,7 @@
           <a:p/>
           <a:p>
             <a:r>
-              <a:t>THỜI LƯỢNG DỰ KIẾN: 1.5 phút (PROJECT_PROPOSAL)</a:t>
+              <a:t>THỜI LƯỢNG DỰ KIẾN: 70 giây (~1.2 phút) (PROJECT_PROPOSAL)</a:t>
             </a:r>
           </a:p>
           <a:p>

--- a/reports/stage20/presentations/03_QUAN_LY_DU_AN_CNTT_WORKSPHERE.pptx
+++ b/reports/stage20/presentations/03_QUAN_LY_DU_AN_CNTT_WORKSPHERE.pptx
@@ -642,7 +642,7 @@
           <a:p/>
           <a:p>
             <a:r>
-              <a:t>THỜI LƯỢNG DỰ KIẾN: 60 giây (~1.0 phút) (PROJECT_PROPOSAL)</a:t>
+              <a:t>THỜI LƯỢNG DỰ KIẾN: 50 giây (~0.8 phút) (PROJECT_PROPOSAL)</a:t>
             </a:r>
           </a:p>
           <a:p>
@@ -754,7 +754,7 @@
           <a:p/>
           <a:p>
             <a:r>
-              <a:t>THỜI LƯỢNG DỰ KIẾN: 65 giây (~1.1 phút) (PROJECT_PROPOSAL)</a:t>
+              <a:t>THỜI LƯỢNG DỰ KIẾN: 50 giây (~0.8 phút) (PROJECT_PROPOSAL)</a:t>
             </a:r>
           </a:p>
           <a:p>
@@ -866,7 +866,7 @@
           <a:p/>
           <a:p>
             <a:r>
-              <a:t>THỜI LƯỢNG DỰ KIẾN: 30 giây (~0.5 phút) (PROJECT_PROPOSAL)</a:t>
+              <a:t>THỜI LƯỢNG DỰ KIẾN: 25 giây (~0.4 phút) (PROJECT_PROPOSAL)</a:t>
             </a:r>
           </a:p>
           <a:p>
@@ -978,7 +978,7 @@
           <a:p/>
           <a:p>
             <a:r>
-              <a:t>THỜI LƯỢNG DỰ KIẾN: 50 giây (~0.8 phút) (PROJECT_PROPOSAL)</a:t>
+              <a:t>THỜI LƯỢNG DỰ KIẾN: 40 giây (~0.7 phút) (PROJECT_PROPOSAL)</a:t>
             </a:r>
           </a:p>
           <a:p>
@@ -1090,7 +1090,7 @@
           <a:p/>
           <a:p>
             <a:r>
-              <a:t>THỜI LƯỢNG DỰ KIẾN: 60 giây (~1.0 phút) (PROJECT_PROPOSAL)</a:t>
+              <a:t>THỜI LƯỢNG DỰ KIẾN: 50 giây (~0.8 phút) (PROJECT_PROPOSAL)</a:t>
             </a:r>
           </a:p>
           <a:p>
@@ -1202,7 +1202,7 @@
           <a:p/>
           <a:p>
             <a:r>
-              <a:t>THỜI LƯỢNG DỰ KIẾN: 55 giây (~0.9 phút) (PROJECT_PROPOSAL)</a:t>
+              <a:t>THỜI LƯỢNG DỰ KIẾN: 45 giây (~0.8 phút) (PROJECT_PROPOSAL)</a:t>
             </a:r>
           </a:p>
           <a:p>
@@ -1314,7 +1314,7 @@
           <a:p/>
           <a:p>
             <a:r>
-              <a:t>THỜI LƯỢNG DỰ KIẾN: 70 giây (~1.2 phút) (PROJECT_PROPOSAL)</a:t>
+              <a:t>THỜI LƯỢNG DỰ KIẾN: 60 giây (~1.0 phút) (PROJECT_PROPOSAL)</a:t>
             </a:r>
           </a:p>
           <a:p>
@@ -1426,7 +1426,7 @@
           <a:p/>
           <a:p>
             <a:r>
-              <a:t>THỜI LƯỢNG DỰ KIẾN: 80 giây (~1.3 phút) (PROJECT_PROPOSAL)</a:t>
+              <a:t>THỜI LƯỢNG DỰ KIẾN: 65 giây (~1.1 phút) (PROJECT_PROPOSAL)</a:t>
             </a:r>
           </a:p>
           <a:p>
@@ -1538,7 +1538,7 @@
           <a:p/>
           <a:p>
             <a:r>
-              <a:t>THỜI LƯỢNG DỰ KIẾN: 75 giây (~1.2 phút) (PROJECT_PROPOSAL)</a:t>
+              <a:t>THỜI LƯỢNG DỰ KIẾN: 60 giây (~1.0 phút) (PROJECT_PROPOSAL)</a:t>
             </a:r>
           </a:p>
           <a:p>
@@ -1650,7 +1650,7 @@
           <a:p/>
           <a:p>
             <a:r>
-              <a:t>THỜI LƯỢNG DỰ KIẾN: 65 giây (~1.1 phút) (PROJECT_PROPOSAL)</a:t>
+              <a:t>THỜI LƯỢNG DỰ KIẾN: 55 giây (~0.9 phút) (PROJECT_PROPOSAL)</a:t>
             </a:r>
           </a:p>
           <a:p>
@@ -1762,7 +1762,7 @@
           <a:p/>
           <a:p>
             <a:r>
-              <a:t>THỜI LƯỢNG DỰ KIẾN: 70 giây (~1.2 phút) (PROJECT_PROPOSAL)</a:t>
+              <a:t>THỜI LƯỢNG DỰ KIẾN: 60 giây (~1.0 phút) (PROJECT_PROPOSAL)</a:t>
             </a:r>
           </a:p>
           <a:p>
